--- a/BizzSummit/2026/00_entrada/Recursos.pptx
+++ b/BizzSummit/2026/00_entrada/Recursos.pptx
@@ -6,6 +6,13 @@
   </p:sldMasterIdLst>
   <p:sldIdLst>
     <p:sldId id="256" r:id="rId2"/>
+    <p:sldId id="257" r:id="rId3"/>
+    <p:sldId id="258" r:id="rId4"/>
+    <p:sldId id="259" r:id="rId5"/>
+    <p:sldId id="260" r:id="rId6"/>
+    <p:sldId id="261" r:id="rId7"/>
+    <p:sldId id="262" r:id="rId8"/>
+    <p:sldId id="263" r:id="rId9"/>
   </p:sldIdLst>
   <p:sldSz cx="12192000" cy="6858000"/>
   <p:notesSz cx="6858000" cy="9144000"/>
@@ -104,6 +111,11 @@
       </a:defRPr>
     </a:lvl9pPr>
   </p:defaultTextStyle>
+  <p:extLst>
+    <p:ext uri="{EFAFB233-063F-42B5-8137-9DF3F51BA10A}">
+      <p15:sldGuideLst xmlns:p15="http://schemas.microsoft.com/office/powerpoint/2012/main"/>
+    </p:ext>
+  </p:extLst>
 </p:presentation>
 </file>
 
@@ -254,7 +266,7 @@
           <a:p>
             <a:fld id="{5D237EE9-FE2D-4B98-B178-1153273E8850}" type="datetimeFigureOut">
               <a:rPr lang="es-ES" smtClean="0"/>
-              <a:t>12/09/2026</a:t>
+              <a:t>02/10/2026</a:t>
             </a:fld>
             <a:endParaRPr lang="es-ES"/>
           </a:p>
@@ -452,7 +464,7 @@
           <a:p>
             <a:fld id="{5D237EE9-FE2D-4B98-B178-1153273E8850}" type="datetimeFigureOut">
               <a:rPr lang="es-ES" smtClean="0"/>
-              <a:t>12/09/2026</a:t>
+              <a:t>02/10/2026</a:t>
             </a:fld>
             <a:endParaRPr lang="es-ES"/>
           </a:p>
@@ -660,7 +672,7 @@
           <a:p>
             <a:fld id="{5D237EE9-FE2D-4B98-B178-1153273E8850}" type="datetimeFigureOut">
               <a:rPr lang="es-ES" smtClean="0"/>
-              <a:t>12/09/2026</a:t>
+              <a:t>02/10/2026</a:t>
             </a:fld>
             <a:endParaRPr lang="es-ES"/>
           </a:p>
@@ -858,7 +870,7 @@
           <a:p>
             <a:fld id="{5D237EE9-FE2D-4B98-B178-1153273E8850}" type="datetimeFigureOut">
               <a:rPr lang="es-ES" smtClean="0"/>
-              <a:t>12/09/2026</a:t>
+              <a:t>02/10/2026</a:t>
             </a:fld>
             <a:endParaRPr lang="es-ES"/>
           </a:p>
@@ -1133,7 +1145,7 @@
           <a:p>
             <a:fld id="{5D237EE9-FE2D-4B98-B178-1153273E8850}" type="datetimeFigureOut">
               <a:rPr lang="es-ES" smtClean="0"/>
-              <a:t>12/09/2026</a:t>
+              <a:t>02/10/2026</a:t>
             </a:fld>
             <a:endParaRPr lang="es-ES"/>
           </a:p>
@@ -1398,7 +1410,7 @@
           <a:p>
             <a:fld id="{5D237EE9-FE2D-4B98-B178-1153273E8850}" type="datetimeFigureOut">
               <a:rPr lang="es-ES" smtClean="0"/>
-              <a:t>12/09/2026</a:t>
+              <a:t>02/10/2026</a:t>
             </a:fld>
             <a:endParaRPr lang="es-ES"/>
           </a:p>
@@ -1810,7 +1822,7 @@
           <a:p>
             <a:fld id="{5D237EE9-FE2D-4B98-B178-1153273E8850}" type="datetimeFigureOut">
               <a:rPr lang="es-ES" smtClean="0"/>
-              <a:t>12/09/2026</a:t>
+              <a:t>02/10/2026</a:t>
             </a:fld>
             <a:endParaRPr lang="es-ES"/>
           </a:p>
@@ -1951,7 +1963,7 @@
           <a:p>
             <a:fld id="{5D237EE9-FE2D-4B98-B178-1153273E8850}" type="datetimeFigureOut">
               <a:rPr lang="es-ES" smtClean="0"/>
-              <a:t>12/09/2026</a:t>
+              <a:t>02/10/2026</a:t>
             </a:fld>
             <a:endParaRPr lang="es-ES"/>
           </a:p>
@@ -2064,7 +2076,7 @@
           <a:p>
             <a:fld id="{5D237EE9-FE2D-4B98-B178-1153273E8850}" type="datetimeFigureOut">
               <a:rPr lang="es-ES" smtClean="0"/>
-              <a:t>12/09/2026</a:t>
+              <a:t>02/10/2026</a:t>
             </a:fld>
             <a:endParaRPr lang="es-ES"/>
           </a:p>
@@ -2375,7 +2387,7 @@
           <a:p>
             <a:fld id="{5D237EE9-FE2D-4B98-B178-1153273E8850}" type="datetimeFigureOut">
               <a:rPr lang="es-ES" smtClean="0"/>
-              <a:t>12/09/2026</a:t>
+              <a:t>02/10/2026</a:t>
             </a:fld>
             <a:endParaRPr lang="es-ES"/>
           </a:p>
@@ -2663,7 +2675,7 @@
           <a:p>
             <a:fld id="{5D237EE9-FE2D-4B98-B178-1153273E8850}" type="datetimeFigureOut">
               <a:rPr lang="es-ES" smtClean="0"/>
-              <a:t>12/09/2026</a:t>
+              <a:t>02/10/2026</a:t>
             </a:fld>
             <a:endParaRPr lang="es-ES"/>
           </a:p>
@@ -2904,7 +2916,7 @@
           <a:p>
             <a:fld id="{5D237EE9-FE2D-4B98-B178-1153273E8850}" type="datetimeFigureOut">
               <a:rPr lang="es-ES" smtClean="0"/>
-              <a:t>12/09/2026</a:t>
+              <a:t>02/10/2026</a:t>
             </a:fld>
             <a:endParaRPr lang="es-ES"/>
           </a:p>
@@ -3405,6 +3417,650 @@
     <p:extLst>
       <p:ext uri="{BB962C8B-B14F-4D97-AF65-F5344CB8AC3E}">
         <p14:creationId xmlns:p14="http://schemas.microsoft.com/office/powerpoint/2010/main" val="75959940"/>
+      </p:ext>
+    </p:extLst>
+  </p:cSld>
+  <p:clrMapOvr>
+    <a:masterClrMapping/>
+  </p:clrMapOvr>
+</p:sld>
+</file>
+
+<file path=ppt/slides/slide2.xml><?xml version="1.0" encoding="utf-8"?>
+<p:sld xmlns:a="http://schemas.openxmlformats.org/drawingml/2006/main" xmlns:r="http://schemas.openxmlformats.org/officeDocument/2006/relationships" xmlns:p="http://schemas.openxmlformats.org/presentationml/2006/main">
+  <p:cSld>
+    <p:spTree>
+      <p:nvGrpSpPr>
+        <p:cNvPr id="1" name=""/>
+        <p:cNvGrpSpPr/>
+        <p:nvPr/>
+      </p:nvGrpSpPr>
+      <p:grpSpPr>
+        <a:xfrm>
+          <a:off x="0" y="0"/>
+          <a:ext cx="0" cy="0"/>
+          <a:chOff x="0" y="0"/>
+          <a:chExt cx="0" cy="0"/>
+        </a:xfrm>
+      </p:grpSpPr>
+      <p:pic>
+        <p:nvPicPr>
+          <p:cNvPr id="3" name="Imagen 2" descr="The image shows a command-line interface displaying the setup process for Agent 365, with detected details such as stack, language, and configuration options.&#10;&#10;El contenido generado por IA puede ser incorrecto.">
+            <a:extLst>
+              <a:ext uri="{FF2B5EF4-FFF2-40B4-BE49-F238E27FC236}">
+                <a16:creationId xmlns:a16="http://schemas.microsoft.com/office/drawing/2014/main" id="{1EAF2780-7C5C-83DF-3B6D-DD0B5C696DAC}"/>
+              </a:ext>
+            </a:extLst>
+          </p:cNvPr>
+          <p:cNvPicPr>
+            <a:picLocks noChangeAspect="1"/>
+          </p:cNvPicPr>
+          <p:nvPr/>
+        </p:nvPicPr>
+        <p:blipFill>
+          <a:blip r:embed="rId2"/>
+          <a:stretch>
+            <a:fillRect/>
+          </a:stretch>
+        </p:blipFill>
+        <p:spPr>
+          <a:xfrm>
+            <a:off x="5412835" y="-130629"/>
+            <a:ext cx="6885388" cy="6858000"/>
+          </a:xfrm>
+          <a:prstGeom prst="rect">
+            <a:avLst/>
+          </a:prstGeom>
+        </p:spPr>
+      </p:pic>
+      <p:sp>
+        <p:nvSpPr>
+          <p:cNvPr id="5" name="CuadroTexto 4">
+            <a:extLst>
+              <a:ext uri="{FF2B5EF4-FFF2-40B4-BE49-F238E27FC236}">
+                <a16:creationId xmlns:a16="http://schemas.microsoft.com/office/drawing/2014/main" id="{9E622368-0E8D-AAC2-36B1-B94C45A5D5FA}"/>
+              </a:ext>
+            </a:extLst>
+          </p:cNvPr>
+          <p:cNvSpPr txBox="1"/>
+          <p:nvPr/>
+        </p:nvSpPr>
+        <p:spPr>
+          <a:xfrm>
+            <a:off x="414213" y="1143218"/>
+            <a:ext cx="6097112" cy="1200329"/>
+          </a:xfrm>
+          <a:prstGeom prst="rect">
+            <a:avLst/>
+          </a:prstGeom>
+          <a:noFill/>
+        </p:spPr>
+        <p:txBody>
+          <a:bodyPr wrap="square">
+            <a:spAutoFit/>
+          </a:bodyPr>
+          <a:lstStyle/>
+          <a:p>
+            <a:r>
+              <a:rPr lang="es-ES" dirty="0" err="1">
+                <a:hlinkClick r:id="rId3"/>
+              </a:rPr>
+              <a:t>microsoft</a:t>
+            </a:r>
+            <a:r>
+              <a:rPr lang="es-ES" dirty="0">
+                <a:hlinkClick r:id="rId3"/>
+              </a:rPr>
+              <a:t>/agent365-skills: AI </a:t>
+            </a:r>
+            <a:r>
+              <a:rPr lang="es-ES" dirty="0" err="1">
+                <a:hlinkClick r:id="rId3"/>
+              </a:rPr>
+              <a:t>coding</a:t>
+            </a:r>
+            <a:r>
+              <a:rPr lang="es-ES" dirty="0">
+                <a:hlinkClick r:id="rId3"/>
+              </a:rPr>
+              <a:t> </a:t>
+            </a:r>
+            <a:r>
+              <a:rPr lang="es-ES" dirty="0" err="1">
+                <a:hlinkClick r:id="rId3"/>
+              </a:rPr>
+              <a:t>skills</a:t>
+            </a:r>
+            <a:r>
+              <a:rPr lang="es-ES" dirty="0">
+                <a:hlinkClick r:id="rId3"/>
+              </a:rPr>
+              <a:t> </a:t>
+            </a:r>
+            <a:r>
+              <a:rPr lang="es-ES" dirty="0" err="1">
+                <a:hlinkClick r:id="rId3"/>
+              </a:rPr>
+              <a:t>for</a:t>
+            </a:r>
+            <a:r>
+              <a:rPr lang="es-ES" dirty="0">
+                <a:hlinkClick r:id="rId3"/>
+              </a:rPr>
+              <a:t> Microsoft Agent 365 — </a:t>
+            </a:r>
+            <a:r>
+              <a:rPr lang="es-ES" dirty="0" err="1">
+                <a:hlinkClick r:id="rId3"/>
+              </a:rPr>
+              <a:t>transform</a:t>
+            </a:r>
+            <a:r>
+              <a:rPr lang="es-ES" dirty="0">
+                <a:hlinkClick r:id="rId3"/>
+              </a:rPr>
+              <a:t> </a:t>
+            </a:r>
+            <a:r>
+              <a:rPr lang="es-ES" dirty="0" err="1">
+                <a:hlinkClick r:id="rId3"/>
+              </a:rPr>
+              <a:t>agents</a:t>
+            </a:r>
+            <a:r>
+              <a:rPr lang="es-ES" dirty="0">
+                <a:hlinkClick r:id="rId3"/>
+              </a:rPr>
+              <a:t> </a:t>
+            </a:r>
+            <a:r>
+              <a:rPr lang="es-ES" dirty="0" err="1">
+                <a:hlinkClick r:id="rId3"/>
+              </a:rPr>
+              <a:t>into</a:t>
+            </a:r>
+            <a:r>
+              <a:rPr lang="es-ES" dirty="0">
+                <a:hlinkClick r:id="rId3"/>
+              </a:rPr>
+              <a:t> AI </a:t>
+            </a:r>
+            <a:r>
+              <a:rPr lang="es-ES" dirty="0" err="1">
+                <a:hlinkClick r:id="rId3"/>
+              </a:rPr>
+              <a:t>Teammates</a:t>
+            </a:r>
+            <a:r>
+              <a:rPr lang="es-ES" dirty="0">
+                <a:hlinkClick r:id="rId3"/>
+              </a:rPr>
+              <a:t> </a:t>
+            </a:r>
+            <a:r>
+              <a:rPr lang="es-ES" dirty="0" err="1">
+                <a:hlinkClick r:id="rId3"/>
+              </a:rPr>
+              <a:t>with</a:t>
+            </a:r>
+            <a:r>
+              <a:rPr lang="es-ES" dirty="0">
+                <a:hlinkClick r:id="rId3"/>
+              </a:rPr>
+              <a:t> </a:t>
+            </a:r>
+            <a:r>
+              <a:rPr lang="es-ES" dirty="0" err="1">
+                <a:hlinkClick r:id="rId3"/>
+              </a:rPr>
+              <a:t>Teams</a:t>
+            </a:r>
+            <a:r>
+              <a:rPr lang="es-ES" dirty="0">
+                <a:hlinkClick r:id="rId3"/>
+              </a:rPr>
+              <a:t> hosting, </a:t>
+            </a:r>
+            <a:r>
+              <a:rPr lang="es-ES" dirty="0" err="1">
+                <a:hlinkClick r:id="rId3"/>
+              </a:rPr>
+              <a:t>WorkIQ</a:t>
+            </a:r>
+            <a:r>
+              <a:rPr lang="es-ES" dirty="0">
+                <a:hlinkClick r:id="rId3"/>
+              </a:rPr>
+              <a:t> MCP </a:t>
+            </a:r>
+            <a:r>
+              <a:rPr lang="es-ES" dirty="0" err="1">
+                <a:hlinkClick r:id="rId3"/>
+              </a:rPr>
+              <a:t>tools</a:t>
+            </a:r>
+            <a:r>
+              <a:rPr lang="es-ES" dirty="0">
+                <a:hlinkClick r:id="rId3"/>
+              </a:rPr>
+              <a:t>, and </a:t>
+            </a:r>
+            <a:r>
+              <a:rPr lang="es-ES" dirty="0" err="1">
+                <a:hlinkClick r:id="rId3"/>
+              </a:rPr>
+              <a:t>OTel</a:t>
+            </a:r>
+            <a:r>
+              <a:rPr lang="es-ES" dirty="0">
+                <a:hlinkClick r:id="rId3"/>
+              </a:rPr>
+              <a:t> </a:t>
+            </a:r>
+            <a:r>
+              <a:rPr lang="es-ES" dirty="0" err="1">
+                <a:hlinkClick r:id="rId3"/>
+              </a:rPr>
+              <a:t>observability</a:t>
+            </a:r>
+            <a:r>
+              <a:rPr lang="es-ES" dirty="0">
+                <a:hlinkClick r:id="rId3"/>
+              </a:rPr>
+              <a:t>. Works </a:t>
+            </a:r>
+            <a:r>
+              <a:rPr lang="es-ES" dirty="0" err="1">
+                <a:hlinkClick r:id="rId3"/>
+              </a:rPr>
+              <a:t>with</a:t>
+            </a:r>
+            <a:r>
+              <a:rPr lang="es-ES" dirty="0">
+                <a:hlinkClick r:id="rId3"/>
+              </a:rPr>
+              <a:t> Claude Code and GitHub </a:t>
+            </a:r>
+            <a:r>
+              <a:rPr lang="es-ES" dirty="0" err="1">
+                <a:hlinkClick r:id="rId3"/>
+              </a:rPr>
+              <a:t>Copilot</a:t>
+            </a:r>
+            <a:r>
+              <a:rPr lang="es-ES" dirty="0">
+                <a:hlinkClick r:id="rId3"/>
+              </a:rPr>
+              <a:t>.</a:t>
+            </a:r>
+            <a:endParaRPr lang="es-ES" dirty="0"/>
+          </a:p>
+        </p:txBody>
+      </p:sp>
+    </p:spTree>
+    <p:extLst>
+      <p:ext uri="{BB962C8B-B14F-4D97-AF65-F5344CB8AC3E}">
+        <p14:creationId xmlns:p14="http://schemas.microsoft.com/office/powerpoint/2010/main" val="3305733283"/>
+      </p:ext>
+    </p:extLst>
+  </p:cSld>
+  <p:clrMapOvr>
+    <a:masterClrMapping/>
+  </p:clrMapOvr>
+</p:sld>
+</file>
+
+<file path=ppt/slides/slide3.xml><?xml version="1.0" encoding="utf-8"?>
+<p:sld xmlns:a="http://schemas.openxmlformats.org/drawingml/2006/main" xmlns:r="http://schemas.openxmlformats.org/officeDocument/2006/relationships" xmlns:p="http://schemas.openxmlformats.org/presentationml/2006/main">
+  <p:cSld>
+    <p:spTree>
+      <p:nvGrpSpPr>
+        <p:cNvPr id="1" name=""/>
+        <p:cNvGrpSpPr/>
+        <p:nvPr/>
+      </p:nvGrpSpPr>
+      <p:grpSpPr>
+        <a:xfrm>
+          <a:off x="0" y="0"/>
+          <a:ext cx="0" cy="0"/>
+          <a:chOff x="0" y="0"/>
+          <a:chExt cx="0" cy="0"/>
+        </a:xfrm>
+      </p:grpSpPr>
+      <p:pic>
+        <p:nvPicPr>
+          <p:cNvPr id="3" name="Imagen 2" descr="The image depicts a user interface of a workflow automation tool, specifically M365 Copilot (V2), showing a process for reviewing and categorizing unread emails from the previous day.&#10;&#10;El contenido generado por IA puede ser incorrecto.">
+            <a:extLst>
+              <a:ext uri="{FF2B5EF4-FFF2-40B4-BE49-F238E27FC236}">
+                <a16:creationId xmlns:a16="http://schemas.microsoft.com/office/drawing/2014/main" id="{D2710087-DFC4-2BF4-B49A-C06DE3195138}"/>
+              </a:ext>
+            </a:extLst>
+          </p:cNvPr>
+          <p:cNvPicPr>
+            <a:picLocks noChangeAspect="1"/>
+          </p:cNvPicPr>
+          <p:nvPr/>
+        </p:nvPicPr>
+        <p:blipFill>
+          <a:blip r:embed="rId2"/>
+          <a:stretch>
+            <a:fillRect/>
+          </a:stretch>
+        </p:blipFill>
+        <p:spPr>
+          <a:xfrm>
+            <a:off x="3421" y="0"/>
+            <a:ext cx="12185158" cy="6858000"/>
+          </a:xfrm>
+          <a:prstGeom prst="rect">
+            <a:avLst/>
+          </a:prstGeom>
+        </p:spPr>
+      </p:pic>
+    </p:spTree>
+    <p:extLst>
+      <p:ext uri="{BB962C8B-B14F-4D97-AF65-F5344CB8AC3E}">
+        <p14:creationId xmlns:p14="http://schemas.microsoft.com/office/powerpoint/2010/main" val="3573075364"/>
+      </p:ext>
+    </p:extLst>
+  </p:cSld>
+  <p:clrMapOvr>
+    <a:masterClrMapping/>
+  </p:clrMapOvr>
+</p:sld>
+</file>
+
+<file path=ppt/slides/slide4.xml><?xml version="1.0" encoding="utf-8"?>
+<p:sld xmlns:a="http://schemas.openxmlformats.org/drawingml/2006/main" xmlns:r="http://schemas.openxmlformats.org/officeDocument/2006/relationships" xmlns:p="http://schemas.openxmlformats.org/presentationml/2006/main">
+  <p:cSld>
+    <p:spTree>
+      <p:nvGrpSpPr>
+        <p:cNvPr id="1" name=""/>
+        <p:cNvGrpSpPr/>
+        <p:nvPr/>
+      </p:nvGrpSpPr>
+      <p:grpSpPr>
+        <a:xfrm>
+          <a:off x="0" y="0"/>
+          <a:ext cx="0" cy="0"/>
+          <a:chOff x="0" y="0"/>
+          <a:chExt cx="0" cy="0"/>
+        </a:xfrm>
+      </p:grpSpPr>
+      <p:pic>
+        <p:nvPicPr>
+          <p:cNvPr id="3" name="Imagen 2" descr="The image contains instructions for setting up Azure CLI session, selecting tenant, and assigning necessary permissions for blueprint creation.&#10;&#10;El contenido generado por IA puede ser incorrecto.">
+            <a:extLst>
+              <a:ext uri="{FF2B5EF4-FFF2-40B4-BE49-F238E27FC236}">
+                <a16:creationId xmlns:a16="http://schemas.microsoft.com/office/drawing/2014/main" id="{B28AA4A5-64CA-2482-880E-FBDBE0AF5CE5}"/>
+              </a:ext>
+            </a:extLst>
+          </p:cNvPr>
+          <p:cNvPicPr>
+            <a:picLocks noChangeAspect="1"/>
+          </p:cNvPicPr>
+          <p:nvPr/>
+        </p:nvPicPr>
+        <p:blipFill>
+          <a:blip r:embed="rId2"/>
+          <a:stretch>
+            <a:fillRect/>
+          </a:stretch>
+        </p:blipFill>
+        <p:spPr>
+          <a:xfrm>
+            <a:off x="0" y="416524"/>
+            <a:ext cx="12192000" cy="6024952"/>
+          </a:xfrm>
+          <a:prstGeom prst="rect">
+            <a:avLst/>
+          </a:prstGeom>
+        </p:spPr>
+      </p:pic>
+    </p:spTree>
+    <p:extLst>
+      <p:ext uri="{BB962C8B-B14F-4D97-AF65-F5344CB8AC3E}">
+        <p14:creationId xmlns:p14="http://schemas.microsoft.com/office/powerpoint/2010/main" val="1422309965"/>
+      </p:ext>
+    </p:extLst>
+  </p:cSld>
+  <p:clrMapOvr>
+    <a:masterClrMapping/>
+  </p:clrMapOvr>
+</p:sld>
+</file>
+
+<file path=ppt/slides/slide5.xml><?xml version="1.0" encoding="utf-8"?>
+<p:sld xmlns:a="http://schemas.openxmlformats.org/drawingml/2006/main" xmlns:r="http://schemas.openxmlformats.org/officeDocument/2006/relationships" xmlns:p="http://schemas.openxmlformats.org/presentationml/2006/main">
+  <p:cSld>
+    <p:spTree>
+      <p:nvGrpSpPr>
+        <p:cNvPr id="1" name=""/>
+        <p:cNvGrpSpPr/>
+        <p:nvPr/>
+      </p:nvGrpSpPr>
+      <p:grpSpPr>
+        <a:xfrm>
+          <a:off x="0" y="0"/>
+          <a:ext cx="0" cy="0"/>
+          <a:chOff x="0" y="0"/>
+          <a:chExt cx="0" cy="0"/>
+        </a:xfrm>
+      </p:grpSpPr>
+      <p:pic>
+        <p:nvPicPr>
+          <p:cNvPr id="3" name="Imagen 2" descr="FsTriageDevoluciones&#10;&#10;El contenido generado por IA puede ser incorrecto.">
+            <a:extLst>
+              <a:ext uri="{FF2B5EF4-FFF2-40B4-BE49-F238E27FC236}">
+                <a16:creationId xmlns:a16="http://schemas.microsoft.com/office/drawing/2014/main" id="{B41B2992-C24E-5DB3-8046-CC39128A54D1}"/>
+              </a:ext>
+            </a:extLst>
+          </p:cNvPr>
+          <p:cNvPicPr>
+            <a:picLocks noChangeAspect="1"/>
+          </p:cNvPicPr>
+          <p:nvPr/>
+        </p:nvPicPr>
+        <p:blipFill>
+          <a:blip r:embed="rId2"/>
+          <a:stretch>
+            <a:fillRect/>
+          </a:stretch>
+        </p:blipFill>
+        <p:spPr>
+          <a:xfrm>
+            <a:off x="4357287" y="0"/>
+            <a:ext cx="3477425" cy="6858000"/>
+          </a:xfrm>
+          <a:prstGeom prst="rect">
+            <a:avLst/>
+          </a:prstGeom>
+        </p:spPr>
+      </p:pic>
+    </p:spTree>
+    <p:extLst>
+      <p:ext uri="{BB962C8B-B14F-4D97-AF65-F5344CB8AC3E}">
+        <p14:creationId xmlns:p14="http://schemas.microsoft.com/office/powerpoint/2010/main" val="2478138164"/>
+      </p:ext>
+    </p:extLst>
+  </p:cSld>
+  <p:clrMapOvr>
+    <a:masterClrMapping/>
+  </p:clrMapOvr>
+</p:sld>
+</file>
+
+<file path=ppt/slides/slide6.xml><?xml version="1.0" encoding="utf-8"?>
+<p:sld xmlns:a="http://schemas.openxmlformats.org/drawingml/2006/main" xmlns:r="http://schemas.openxmlformats.org/officeDocument/2006/relationships" xmlns:p="http://schemas.openxmlformats.org/presentationml/2006/main">
+  <p:cSld>
+    <p:spTree>
+      <p:nvGrpSpPr>
+        <p:cNvPr id="1" name=""/>
+        <p:cNvGrpSpPr/>
+        <p:nvPr/>
+      </p:nvGrpSpPr>
+      <p:grpSpPr>
+        <a:xfrm>
+          <a:off x="0" y="0"/>
+          <a:ext cx="0" cy="0"/>
+          <a:chOff x="0" y="0"/>
+          <a:chExt cx="0" cy="0"/>
+        </a:xfrm>
+      </p:grpSpPr>
+      <p:pic>
+        <p:nvPicPr>
+          <p:cNvPr id="3" name="Imagen 2" descr="The image displays a user interface for an agent management system, featuring sections for creating agents, searching for agents, and managing workflows and content.&#10;&#10;El contenido generado por IA puede ser incorrecto.">
+            <a:extLst>
+              <a:ext uri="{FF2B5EF4-FFF2-40B4-BE49-F238E27FC236}">
+                <a16:creationId xmlns:a16="http://schemas.microsoft.com/office/drawing/2014/main" id="{896BFC11-6C2A-B588-836B-FE1E13EFB388}"/>
+              </a:ext>
+            </a:extLst>
+          </p:cNvPr>
+          <p:cNvPicPr>
+            <a:picLocks noChangeAspect="1"/>
+          </p:cNvPicPr>
+          <p:nvPr/>
+        </p:nvPicPr>
+        <p:blipFill>
+          <a:blip r:embed="rId2"/>
+          <a:stretch>
+            <a:fillRect/>
+          </a:stretch>
+        </p:blipFill>
+        <p:spPr>
+          <a:xfrm>
+            <a:off x="332476" y="0"/>
+            <a:ext cx="11527047" cy="6858000"/>
+          </a:xfrm>
+          <a:prstGeom prst="rect">
+            <a:avLst/>
+          </a:prstGeom>
+        </p:spPr>
+      </p:pic>
+    </p:spTree>
+    <p:extLst>
+      <p:ext uri="{BB962C8B-B14F-4D97-AF65-F5344CB8AC3E}">
+        <p14:creationId xmlns:p14="http://schemas.microsoft.com/office/powerpoint/2010/main" val="4100836214"/>
+      </p:ext>
+    </p:extLst>
+  </p:cSld>
+  <p:clrMapOvr>
+    <a:masterClrMapping/>
+  </p:clrMapOvr>
+</p:sld>
+</file>
+
+<file path=ppt/slides/slide7.xml><?xml version="1.0" encoding="utf-8"?>
+<p:sld xmlns:a="http://schemas.openxmlformats.org/drawingml/2006/main" xmlns:r="http://schemas.openxmlformats.org/officeDocument/2006/relationships" xmlns:p="http://schemas.openxmlformats.org/presentationml/2006/main">
+  <p:cSld>
+    <p:spTree>
+      <p:nvGrpSpPr>
+        <p:cNvPr id="1" name=""/>
+        <p:cNvGrpSpPr/>
+        <p:nvPr/>
+      </p:nvGrpSpPr>
+      <p:grpSpPr>
+        <a:xfrm>
+          <a:off x="0" y="0"/>
+          <a:ext cx="0" cy="0"/>
+          <a:chOff x="0" y="0"/>
+          <a:chExt cx="0" cy="0"/>
+        </a:xfrm>
+      </p:grpSpPr>
+      <p:pic>
+        <p:nvPicPr>
+          <p:cNvPr id="3" name="Imagen 2" descr="Running&#10;&#10;El contenido generado por IA puede ser incorrecto.">
+            <a:extLst>
+              <a:ext uri="{FF2B5EF4-FFF2-40B4-BE49-F238E27FC236}">
+                <a16:creationId xmlns:a16="http://schemas.microsoft.com/office/drawing/2014/main" id="{D599B4D8-5C5F-ABE8-5501-D8C0665052BA}"/>
+              </a:ext>
+            </a:extLst>
+          </p:cNvPr>
+          <p:cNvPicPr>
+            <a:picLocks noChangeAspect="1"/>
+          </p:cNvPicPr>
+          <p:nvPr/>
+        </p:nvPicPr>
+        <p:blipFill>
+          <a:blip r:embed="rId2"/>
+          <a:stretch>
+            <a:fillRect/>
+          </a:stretch>
+        </p:blipFill>
+        <p:spPr>
+          <a:xfrm>
+            <a:off x="0" y="540456"/>
+            <a:ext cx="12192000" cy="5777087"/>
+          </a:xfrm>
+          <a:prstGeom prst="rect">
+            <a:avLst/>
+          </a:prstGeom>
+        </p:spPr>
+      </p:pic>
+    </p:spTree>
+    <p:extLst>
+      <p:ext uri="{BB962C8B-B14F-4D97-AF65-F5344CB8AC3E}">
+        <p14:creationId xmlns:p14="http://schemas.microsoft.com/office/powerpoint/2010/main" val="1010409738"/>
+      </p:ext>
+    </p:extLst>
+  </p:cSld>
+  <p:clrMapOvr>
+    <a:masterClrMapping/>
+  </p:clrMapOvr>
+</p:sld>
+</file>
+
+<file path=ppt/slides/slide8.xml><?xml version="1.0" encoding="utf-8"?>
+<p:sld xmlns:a="http://schemas.openxmlformats.org/drawingml/2006/main" xmlns:r="http://schemas.openxmlformats.org/officeDocument/2006/relationships" xmlns:p="http://schemas.openxmlformats.org/presentationml/2006/main">
+  <p:cSld>
+    <p:spTree>
+      <p:nvGrpSpPr>
+        <p:cNvPr id="1" name=""/>
+        <p:cNvGrpSpPr/>
+        <p:nvPr/>
+      </p:nvGrpSpPr>
+      <p:grpSpPr>
+        <a:xfrm>
+          <a:off x="0" y="0"/>
+          <a:ext cx="0" cy="0"/>
+          <a:chOff x="0" y="0"/>
+          <a:chExt cx="0" cy="0"/>
+        </a:xfrm>
+      </p:grpSpPr>
+      <p:pic>
+        <p:nvPicPr>
+          <p:cNvPr id="3" name="Imagen 2" descr="The image shows a document with a summary of a public job announcement from the Ayuntamiento de Santa Cruz de Tenerife, indicating no issues during the compliance tracking process.&#10;&#10;El contenido generado por IA puede ser incorrecto.">
+            <a:extLst>
+              <a:ext uri="{FF2B5EF4-FFF2-40B4-BE49-F238E27FC236}">
+                <a16:creationId xmlns:a16="http://schemas.microsoft.com/office/drawing/2014/main" id="{4555566E-69FA-1606-B510-2B1C03AF56C4}"/>
+              </a:ext>
+            </a:extLst>
+          </p:cNvPr>
+          <p:cNvPicPr>
+            <a:picLocks noChangeAspect="1"/>
+          </p:cNvPicPr>
+          <p:nvPr/>
+        </p:nvPicPr>
+        <p:blipFill>
+          <a:blip r:embed="rId2"/>
+          <a:stretch>
+            <a:fillRect/>
+          </a:stretch>
+        </p:blipFill>
+        <p:spPr>
+          <a:xfrm>
+            <a:off x="2669280" y="0"/>
+            <a:ext cx="6853440" cy="6858000"/>
+          </a:xfrm>
+          <a:prstGeom prst="rect">
+            <a:avLst/>
+          </a:prstGeom>
+        </p:spPr>
+      </p:pic>
+    </p:spTree>
+    <p:extLst>
+      <p:ext uri="{BB962C8B-B14F-4D97-AF65-F5344CB8AC3E}">
+        <p14:creationId xmlns:p14="http://schemas.microsoft.com/office/powerpoint/2010/main" val="4011651040"/>
       </p:ext>
     </p:extLst>
   </p:cSld>
